--- a/問題集/問26-30.pptx
+++ b/問題集/問26-30.pptx
@@ -115,14 +115,6 @@
     </p:ext>
   </p:extLst>
 </p:presentation>
-</file>
-
-<file path=ppt/revisionInfo.xml><?xml version="1.0" encoding="utf-8"?>
-<p1510:revInfo xmlns:a="http://schemas.openxmlformats.org/drawingml/2006/main" xmlns:r="http://schemas.openxmlformats.org/officeDocument/2006/relationships" xmlns:p1510="http://schemas.microsoft.com/office/powerpoint/2015/10/main">
-  <p1510:revLst>
-    <p1510:client id="{22F8ED2B-18D2-4601-9F49-FA8E21207138}" v="3" dt="2026-09-30T14:08:04.627"/>
-  </p1510:revLst>
-</p1510:revInfo>
 </file>
 
 <file path=ppt/changesInfos/changesInfo1.xml><?xml version="1.0" encoding="utf-8"?>
@@ -248,12 +240,103 @@
             <ac:spMk id="3" creationId="{3F1673BF-A543-E6C2-3CCB-832F3F7C8C84}"/>
           </ac:spMkLst>
         </pc:spChg>
-        <pc:spChg chg="add">
-          <ac:chgData name="越智 統" userId="2de33d77-a65a-42d1-92e2-b40da65bb07e" providerId="ADAL" clId="{22F8ED2B-18D2-4601-9F49-FA8E21207138}" dt="2026-09-30T14:07:58.989" v="2057"/>
+      </pc:sldChg>
+    </pc:docChg>
+  </pc:docChgLst>
+  <pc:docChgLst>
+    <pc:chgData name="越智 統" userId="2de33d77-a65a-42d1-92e2-b40da65bb07e" providerId="ADAL" clId="{CC672AF0-535E-4CC8-9DE5-927F74B7A99E}"/>
+    <pc:docChg chg="modSld">
+      <pc:chgData name="越智 統" userId="2de33d77-a65a-42d1-92e2-b40da65bb07e" providerId="ADAL" clId="{CC672AF0-535E-4CC8-9DE5-927F74B7A99E}" dt="2026-10-15T02:54:56.689" v="119" actId="20577"/>
+      <pc:docMkLst>
+        <pc:docMk/>
+      </pc:docMkLst>
+      <pc:sldChg chg="modSp mod">
+        <pc:chgData name="越智 統" userId="2de33d77-a65a-42d1-92e2-b40da65bb07e" providerId="ADAL" clId="{CC672AF0-535E-4CC8-9DE5-927F74B7A99E}" dt="2026-10-15T02:53:43.908" v="4" actId="20577"/>
+        <pc:sldMkLst>
+          <pc:docMk/>
+          <pc:sldMk cId="726608565" sldId="256"/>
+        </pc:sldMkLst>
+        <pc:spChg chg="mod">
+          <ac:chgData name="越智 統" userId="2de33d77-a65a-42d1-92e2-b40da65bb07e" providerId="ADAL" clId="{CC672AF0-535E-4CC8-9DE5-927F74B7A99E}" dt="2026-10-15T02:53:43.908" v="4" actId="20577"/>
+          <ac:spMkLst>
+            <pc:docMk/>
+            <pc:sldMk cId="726608565" sldId="256"/>
+            <ac:spMk id="2" creationId="{23C95CAC-6E1E-1182-775A-A0DF8C1D0E55}"/>
+          </ac:spMkLst>
+        </pc:spChg>
+      </pc:sldChg>
+      <pc:sldChg chg="modSp mod">
+        <pc:chgData name="越智 統" userId="2de33d77-a65a-42d1-92e2-b40da65bb07e" providerId="ADAL" clId="{CC672AF0-535E-4CC8-9DE5-927F74B7A99E}" dt="2026-10-15T02:54:24.305" v="61" actId="20577"/>
+        <pc:sldMkLst>
+          <pc:docMk/>
+          <pc:sldMk cId="1381180910" sldId="257"/>
+        </pc:sldMkLst>
+        <pc:spChg chg="mod">
+          <ac:chgData name="越智 統" userId="2de33d77-a65a-42d1-92e2-b40da65bb07e" providerId="ADAL" clId="{CC672AF0-535E-4CC8-9DE5-927F74B7A99E}" dt="2026-10-15T02:54:24.305" v="61" actId="20577"/>
+          <ac:spMkLst>
+            <pc:docMk/>
+            <pc:sldMk cId="1381180910" sldId="257"/>
+            <ac:spMk id="2" creationId="{B968937A-3176-383E-0947-05E92015501B}"/>
+          </ac:spMkLst>
+        </pc:spChg>
+      </pc:sldChg>
+      <pc:sldChg chg="modSp mod">
+        <pc:chgData name="越智 統" userId="2de33d77-a65a-42d1-92e2-b40da65bb07e" providerId="ADAL" clId="{CC672AF0-535E-4CC8-9DE5-927F74B7A99E}" dt="2026-10-15T02:54:33.716" v="79" actId="20577"/>
+        <pc:sldMkLst>
+          <pc:docMk/>
+          <pc:sldMk cId="3744609821" sldId="258"/>
+        </pc:sldMkLst>
+        <pc:spChg chg="mod">
+          <ac:chgData name="越智 統" userId="2de33d77-a65a-42d1-92e2-b40da65bb07e" providerId="ADAL" clId="{CC672AF0-535E-4CC8-9DE5-927F74B7A99E}" dt="2026-10-15T02:54:33.716" v="79" actId="20577"/>
+          <ac:spMkLst>
+            <pc:docMk/>
+            <pc:sldMk cId="3744609821" sldId="258"/>
+            <ac:spMk id="2" creationId="{D048EBCD-4034-B7BA-617D-CA1001E23782}"/>
+          </ac:spMkLst>
+        </pc:spChg>
+      </pc:sldChg>
+      <pc:sldChg chg="modSp mod">
+        <pc:chgData name="越智 統" userId="2de33d77-a65a-42d1-92e2-b40da65bb07e" providerId="ADAL" clId="{CC672AF0-535E-4CC8-9DE5-927F74B7A99E}" dt="2026-10-15T02:54:42.751" v="90" actId="20577"/>
+        <pc:sldMkLst>
+          <pc:docMk/>
+          <pc:sldMk cId="1708065229" sldId="259"/>
+        </pc:sldMkLst>
+        <pc:spChg chg="mod">
+          <ac:chgData name="越智 統" userId="2de33d77-a65a-42d1-92e2-b40da65bb07e" providerId="ADAL" clId="{CC672AF0-535E-4CC8-9DE5-927F74B7A99E}" dt="2026-10-15T02:54:42.751" v="90" actId="20577"/>
+          <ac:spMkLst>
+            <pc:docMk/>
+            <pc:sldMk cId="1708065229" sldId="259"/>
+            <ac:spMk id="2" creationId="{2AB57BEC-6746-2E08-7CAB-7795EE265F62}"/>
+          </ac:spMkLst>
+        </pc:spChg>
+      </pc:sldChg>
+      <pc:sldChg chg="modSp mod">
+        <pc:chgData name="越智 統" userId="2de33d77-a65a-42d1-92e2-b40da65bb07e" providerId="ADAL" clId="{CC672AF0-535E-4CC8-9DE5-927F74B7A99E}" dt="2026-10-15T02:54:48.916" v="99" actId="20577"/>
+        <pc:sldMkLst>
+          <pc:docMk/>
+          <pc:sldMk cId="726733351" sldId="260"/>
+        </pc:sldMkLst>
+        <pc:spChg chg="mod">
+          <ac:chgData name="越智 統" userId="2de33d77-a65a-42d1-92e2-b40da65bb07e" providerId="ADAL" clId="{CC672AF0-535E-4CC8-9DE5-927F74B7A99E}" dt="2026-10-15T02:54:48.916" v="99" actId="20577"/>
+          <ac:spMkLst>
+            <pc:docMk/>
+            <pc:sldMk cId="726733351" sldId="260"/>
+            <ac:spMk id="2" creationId="{5FE03257-FFC7-2DBD-BE0D-CBFCA97122A9}"/>
+          </ac:spMkLst>
+        </pc:spChg>
+      </pc:sldChg>
+      <pc:sldChg chg="modSp mod">
+        <pc:chgData name="越智 統" userId="2de33d77-a65a-42d1-92e2-b40da65bb07e" providerId="ADAL" clId="{CC672AF0-535E-4CC8-9DE5-927F74B7A99E}" dt="2026-10-15T02:54:56.689" v="119" actId="20577"/>
+        <pc:sldMkLst>
+          <pc:docMk/>
+          <pc:sldMk cId="4182950463" sldId="261"/>
+        </pc:sldMkLst>
+        <pc:spChg chg="mod">
+          <ac:chgData name="越智 統" userId="2de33d77-a65a-42d1-92e2-b40da65bb07e" providerId="ADAL" clId="{CC672AF0-535E-4CC8-9DE5-927F74B7A99E}" dt="2026-10-15T02:54:56.689" v="119" actId="20577"/>
           <ac:spMkLst>
             <pc:docMk/>
             <pc:sldMk cId="4182950463" sldId="261"/>
-            <ac:spMk id="4" creationId="{A283711A-7D54-A837-F95D-18DA3C693512}"/>
+            <ac:spMk id="2" creationId="{3CD92476-9077-3C49-91BA-34D05D1CBB55}"/>
           </ac:spMkLst>
         </pc:spChg>
       </pc:sldChg>
@@ -409,7 +492,7 @@
           <a:p>
             <a:fld id="{4DAFFEB1-BB62-4BC8-914B-D89CCFAA158A}" type="datetimeFigureOut">
               <a:rPr kumimoji="1" lang="ja-JP" altLang="en-US" smtClean="0"/>
-              <a:t>2026/10/1</a:t>
+              <a:t>2026/10/15</a:t>
             </a:fld>
             <a:endParaRPr kumimoji="1" lang="ja-JP" altLang="en-US"/>
           </a:p>
@@ -639,7 +722,7 @@
           <a:p>
             <a:fld id="{4DAFFEB1-BB62-4BC8-914B-D89CCFAA158A}" type="datetimeFigureOut">
               <a:rPr kumimoji="1" lang="ja-JP" altLang="en-US" smtClean="0"/>
-              <a:t>2026/10/1</a:t>
+              <a:t>2026/10/15</a:t>
             </a:fld>
             <a:endParaRPr kumimoji="1" lang="ja-JP" altLang="en-US"/>
           </a:p>
@@ -879,7 +962,7 @@
           <a:p>
             <a:fld id="{4DAFFEB1-BB62-4BC8-914B-D89CCFAA158A}" type="datetimeFigureOut">
               <a:rPr kumimoji="1" lang="ja-JP" altLang="en-US" smtClean="0"/>
-              <a:t>2026/10/1</a:t>
+              <a:t>2026/10/15</a:t>
             </a:fld>
             <a:endParaRPr kumimoji="1" lang="ja-JP" altLang="en-US"/>
           </a:p>
@@ -1109,7 +1192,7 @@
           <a:p>
             <a:fld id="{4DAFFEB1-BB62-4BC8-914B-D89CCFAA158A}" type="datetimeFigureOut">
               <a:rPr kumimoji="1" lang="ja-JP" altLang="en-US" smtClean="0"/>
-              <a:t>2026/10/1</a:t>
+              <a:t>2026/10/15</a:t>
             </a:fld>
             <a:endParaRPr kumimoji="1" lang="ja-JP" altLang="en-US"/>
           </a:p>
@@ -1384,7 +1467,7 @@
           <a:p>
             <a:fld id="{4DAFFEB1-BB62-4BC8-914B-D89CCFAA158A}" type="datetimeFigureOut">
               <a:rPr kumimoji="1" lang="ja-JP" altLang="en-US" smtClean="0"/>
-              <a:t>2026/10/1</a:t>
+              <a:t>2026/10/15</a:t>
             </a:fld>
             <a:endParaRPr kumimoji="1" lang="ja-JP" altLang="en-US"/>
           </a:p>
@@ -1713,7 +1796,7 @@
           <a:p>
             <a:fld id="{4DAFFEB1-BB62-4BC8-914B-D89CCFAA158A}" type="datetimeFigureOut">
               <a:rPr kumimoji="1" lang="ja-JP" altLang="en-US" smtClean="0"/>
-              <a:t>2026/10/1</a:t>
+              <a:t>2026/10/15</a:t>
             </a:fld>
             <a:endParaRPr kumimoji="1" lang="ja-JP" altLang="en-US"/>
           </a:p>
@@ -2189,7 +2272,7 @@
           <a:p>
             <a:fld id="{4DAFFEB1-BB62-4BC8-914B-D89CCFAA158A}" type="datetimeFigureOut">
               <a:rPr kumimoji="1" lang="ja-JP" altLang="en-US" smtClean="0"/>
-              <a:t>2026/10/1</a:t>
+              <a:t>2026/10/15</a:t>
             </a:fld>
             <a:endParaRPr kumimoji="1" lang="ja-JP" altLang="en-US"/>
           </a:p>
@@ -2330,7 +2413,7 @@
           <a:p>
             <a:fld id="{4DAFFEB1-BB62-4BC8-914B-D89CCFAA158A}" type="datetimeFigureOut">
               <a:rPr kumimoji="1" lang="ja-JP" altLang="en-US" smtClean="0"/>
-              <a:t>2026/10/1</a:t>
+              <a:t>2026/10/15</a:t>
             </a:fld>
             <a:endParaRPr kumimoji="1" lang="ja-JP" altLang="en-US"/>
           </a:p>
@@ -2443,7 +2526,7 @@
           <a:p>
             <a:fld id="{4DAFFEB1-BB62-4BC8-914B-D89CCFAA158A}" type="datetimeFigureOut">
               <a:rPr kumimoji="1" lang="ja-JP" altLang="en-US" smtClean="0"/>
-              <a:t>2026/10/1</a:t>
+              <a:t>2026/10/15</a:t>
             </a:fld>
             <a:endParaRPr kumimoji="1" lang="ja-JP" altLang="en-US"/>
           </a:p>
@@ -2786,7 +2869,7 @@
           <a:p>
             <a:fld id="{4DAFFEB1-BB62-4BC8-914B-D89CCFAA158A}" type="datetimeFigureOut">
               <a:rPr kumimoji="1" lang="ja-JP" altLang="en-US" smtClean="0"/>
-              <a:t>2026/10/1</a:t>
+              <a:t>2026/10/15</a:t>
             </a:fld>
             <a:endParaRPr kumimoji="1" lang="ja-JP" altLang="en-US"/>
           </a:p>
@@ -3074,7 +3157,7 @@
           <a:p>
             <a:fld id="{4DAFFEB1-BB62-4BC8-914B-D89CCFAA158A}" type="datetimeFigureOut">
               <a:rPr kumimoji="1" lang="ja-JP" altLang="en-US" smtClean="0"/>
-              <a:t>2026/10/1</a:t>
+              <a:t>2026/10/15</a:t>
             </a:fld>
             <a:endParaRPr kumimoji="1" lang="ja-JP" altLang="en-US"/>
           </a:p>
@@ -3347,7 +3430,7 @@
           <a:p>
             <a:fld id="{4DAFFEB1-BB62-4BC8-914B-D89CCFAA158A}" type="datetimeFigureOut">
               <a:rPr kumimoji="1" lang="ja-JP" altLang="en-US" smtClean="0"/>
-              <a:t>2026/10/1</a:t>
+              <a:t>2026/10/15</a:t>
             </a:fld>
             <a:endParaRPr kumimoji="1" lang="ja-JP" altLang="en-US"/>
           </a:p>
@@ -3785,7 +3868,11 @@
           <a:bodyPr/>
           <a:lstStyle/>
           <a:p>
-            <a:endParaRPr kumimoji="1" lang="ja-JP" altLang="en-US"/>
+            <a:r>
+              <a:rPr kumimoji="1" lang="en-US" altLang="ja-JP" dirty="0"/>
+              <a:t>26-30</a:t>
+            </a:r>
+            <a:endParaRPr kumimoji="1" lang="ja-JP" altLang="en-US" dirty="0"/>
           </a:p>
         </p:txBody>
       </p:sp>
@@ -3871,9 +3958,12 @@
             </a:r>
             <a:r>
               <a:rPr kumimoji="1" lang="en-US" altLang="ja-JP" dirty="0"/>
-              <a:t>26</a:t>
-            </a:r>
-            <a:endParaRPr kumimoji="1" lang="ja-JP" altLang="en-US" dirty="0"/>
+              <a:t>26: </a:t>
+            </a:r>
+            <a:r>
+              <a:rPr kumimoji="1" lang="ja-JP" altLang="en-US" dirty="0"/>
+              <a:t>文字列と実数の変換</a:t>
+            </a:r>
           </a:p>
         </p:txBody>
       </p:sp>
@@ -4119,9 +4209,12 @@
             </a:r>
             <a:r>
               <a:rPr kumimoji="1" lang="en-US" altLang="ja-JP" dirty="0"/>
-              <a:t>27</a:t>
-            </a:r>
-            <a:endParaRPr kumimoji="1" lang="ja-JP" altLang="en-US" dirty="0"/>
+              <a:t>27: </a:t>
+            </a:r>
+            <a:r>
+              <a:rPr kumimoji="1" lang="ja-JP" altLang="en-US" dirty="0"/>
+              <a:t>素因数分解</a:t>
+            </a:r>
           </a:p>
         </p:txBody>
       </p:sp>
@@ -4341,9 +4434,12 @@
             </a:r>
             <a:r>
               <a:rPr kumimoji="1" lang="en-US" altLang="ja-JP" dirty="0"/>
-              <a:t>28</a:t>
-            </a:r>
-            <a:endParaRPr kumimoji="1" lang="ja-JP" altLang="en-US" dirty="0"/>
+              <a:t>28: </a:t>
+            </a:r>
+            <a:r>
+              <a:rPr kumimoji="1" lang="ja-JP" altLang="en-US" dirty="0"/>
+              <a:t>約数</a:t>
+            </a:r>
           </a:p>
         </p:txBody>
       </p:sp>
@@ -4503,9 +4599,12 @@
             </a:r>
             <a:r>
               <a:rPr kumimoji="1" lang="en-US" altLang="ja-JP" dirty="0"/>
-              <a:t>29</a:t>
-            </a:r>
-            <a:endParaRPr kumimoji="1" lang="ja-JP" altLang="en-US" dirty="0"/>
+              <a:t>29: </a:t>
+            </a:r>
+            <a:r>
+              <a:rPr kumimoji="1" lang="ja-JP" altLang="en-US" dirty="0"/>
+              <a:t>素数</a:t>
+            </a:r>
           </a:p>
         </p:txBody>
       </p:sp>
@@ -4718,7 +4817,11 @@
             </a:r>
             <a:r>
               <a:rPr lang="en-US" altLang="ja-JP" dirty="0"/>
-              <a:t>30</a:t>
+              <a:t>30: </a:t>
+            </a:r>
+            <a:r>
+              <a:rPr lang="ja-JP" altLang="en-US"/>
+              <a:t>最大公約数</a:t>
             </a:r>
             <a:endParaRPr kumimoji="1" lang="ja-JP" altLang="en-US" dirty="0"/>
           </a:p>
